--- a/ISS_Tomato_Multi-Omics.pptx
+++ b/ISS_Tomato_Multi-Omics.pptx
@@ -8009,8 +8009,8 @@
         </p:blipFill>
         <p:spPr>
           <a:xfrm>
-            <a:off x="6400800" y="1710403"/>
-            <a:ext cx="5303520" cy="4168714"/>
+            <a:off x="6400800" y="1964004"/>
+            <a:ext cx="5303520" cy="3661511"/>
           </a:xfrm>
           <a:prstGeom prst="rect">
             <a:avLst/>
